--- a/multihop_loication.pptx
+++ b/multihop_loication.pptx
@@ -9,7 +9,7 @@
     <p:notesMasterId r:id="rId5"/>
   </p:notesMasterIdLst>
   <p:handoutMasterIdLst>
-    <p:handoutMasterId r:id="rId11"/>
+    <p:handoutMasterId r:id="rId12"/>
   </p:handoutMasterIdLst>
   <p:sldIdLst>
     <p:sldId id="259" r:id="rId4"/>
@@ -17,12 +17,13 @@
     <p:sldId id="430" r:id="rId7"/>
     <p:sldId id="438" r:id="rId8"/>
     <p:sldId id="417" r:id="rId9"/>
-    <p:sldId id="436" r:id="rId10"/>
+    <p:sldId id="439" r:id="rId10"/>
+    <p:sldId id="436" r:id="rId11"/>
   </p:sldIdLst>
   <p:sldSz cx="12192000" cy="6858000"/>
   <p:notesSz cx="6858000" cy="9144000"/>
   <p:custDataLst>
-    <p:tags r:id="rId18"/>
+    <p:tags r:id="rId19"/>
   </p:custDataLst>
   <p:defaultTextStyle>
     <a:defPPr>
@@ -129,6 +130,7 @@
             <p14:sldId id="430"/>
             <p14:sldId id="438"/>
             <p14:sldId id="417"/>
+            <p14:sldId id="439"/>
             <p14:sldId id="436"/>
           </p14:sldIdLst>
         </p14:section>
@@ -1361,6 +1363,103 @@
 </file>
 
 <file path=ppt/notesSlides/notesSlide6.xml><?xml version="1.0" encoding="utf-8"?>
+<p:notes xmlns:a="http://schemas.openxmlformats.org/drawingml/2006/main" xmlns:r="http://schemas.openxmlformats.org/officeDocument/2006/relationships" xmlns:p="http://schemas.openxmlformats.org/presentationml/2006/main">
+  <p:cSld>
+    <p:spTree>
+      <p:nvGrpSpPr>
+        <p:cNvPr id="1" name=""/>
+        <p:cNvGrpSpPr/>
+        <p:nvPr/>
+      </p:nvGrpSpPr>
+      <p:grpSpPr>
+        <a:xfrm>
+          <a:off x="0" y="0"/>
+          <a:ext cx="0" cy="0"/>
+          <a:chOff x="0" y="0"/>
+          <a:chExt cx="0" cy="0"/>
+        </a:xfrm>
+      </p:grpSpPr>
+      <p:sp>
+        <p:nvSpPr>
+          <p:cNvPr id="2" name="Slide Image Placeholder 1"/>
+          <p:cNvSpPr>
+            <a:spLocks noGrp="1" noRot="1" noChangeAspect="1"/>
+          </p:cNvSpPr>
+          <p:nvPr>
+            <p:ph type="sldImg" idx="2"/>
+          </p:nvPr>
+        </p:nvSpPr>
+        <p:spPr/>
+      </p:sp>
+      <p:sp>
+        <p:nvSpPr>
+          <p:cNvPr id="3" name="Text Placeholder 2"/>
+          <p:cNvSpPr>
+            <a:spLocks noGrp="1"/>
+          </p:cNvSpPr>
+          <p:nvPr>
+            <p:ph type="body" idx="3"/>
+          </p:nvPr>
+        </p:nvSpPr>
+        <p:spPr/>
+        <p:txBody>
+          <a:bodyPr/>
+          <a:lstStyle/>
+          <a:p>
+            <a:r>
+              <a:rPr lang="en-US" altLang="en-US"/>
+              <a:t>Vehicle-to-Everying(V2X) communication has very high standards for safety. To guarantee road safety, messages must be verified within 100ms. But there threee “security-efficieny dilemma”for current authentication methods:</a:t>
+            </a:r>
+            <a:endParaRPr lang="en-US" altLang="en-US"/>
+          </a:p>
+          <a:p>
+            <a:endParaRPr lang="zh-CN" altLang="en-US"/>
+          </a:p>
+          <a:p>
+            <a:r>
+              <a:rPr lang="en-US" altLang="zh-CN"/>
+              <a:t>ECDSA method can provide strong security and non-repudiation but require 2ms to compute verification, this can be bottlenecks in dense traffic</a:t>
+            </a:r>
+            <a:endParaRPr lang="en-US" altLang="zh-CN"/>
+          </a:p>
+          <a:p>
+            <a:r>
+              <a:rPr lang="en-US" altLang="zh-CN"/>
+              <a:t>In comparsion with ECDSA method, TESLA method is more computationally effiecient, but it has “key disclosure delay”,which is from 20ms to 100ms</a:t>
+            </a:r>
+            <a:endParaRPr lang="en-US" altLang="zh-CN"/>
+          </a:p>
+          <a:p>
+            <a:endParaRPr lang="en-US" altLang="zh-CN"/>
+          </a:p>
+          <a:p>
+            <a:r>
+              <a:rPr lang="en-US" altLang="zh-CN"/>
+              <a:t>So the fact shows a gap, that is,  V2X communication requires </a:t>
+            </a:r>
+            <a:r>
+              <a:rPr lang="en-US" altLang="zh-CN">
+                <a:sym typeface="+mn-ea"/>
+              </a:rPr>
+              <a:t>immediate verification, but</a:t>
+            </a:r>
+            <a:r>
+              <a:rPr lang="en-US" altLang="zh-CN"/>
+              <a:t> the existing hybrid schemes are not able to provide high rates of immediate verification, it only provide about 1% immediate verification for non-signed messages.</a:t>
+            </a:r>
+            <a:endParaRPr lang="en-US" altLang="zh-CN"/>
+          </a:p>
+        </p:txBody>
+      </p:sp>
+    </p:spTree>
+  </p:cSld>
+  <p:clrMapOvr>
+    <a:masterClrMapping/>
+  </p:clrMapOvr>
+</p:notes>
+</file>
+
+<file path=ppt/notesSlides/notesSlide7.xml><?xml version="1.0" encoding="utf-8"?>
 <p:notes xmlns:a="http://schemas.openxmlformats.org/drawingml/2006/main" xmlns:r="http://schemas.openxmlformats.org/officeDocument/2006/relationships" xmlns:p="http://schemas.openxmlformats.org/presentationml/2006/main">
   <p:cSld>
     <p:spTree>
@@ -8788,7 +8887,7 @@
           <a:graphicData uri="http://schemas.openxmlformats.org/presentationml/2006/ole">
             <mc:AlternateContent xmlns:mc="http://schemas.openxmlformats.org/markup-compatibility/2006">
               <mc:Choice xmlns:v="urn:schemas-microsoft-com:vml" Requires="v">
-                <p:oleObj spid="_x0000_s1025" name="" r:id="rId6" imgW="241300" imgH="165100" progId="Equation.KSEE3">
+                <p:oleObj spid="_x0000_s16" name="" r:id="rId6" imgW="241300" imgH="165100" progId="Equation.KSEE3">
                   <p:embed/>
                 </p:oleObj>
               </mc:Choice>
@@ -9100,6 +9199,104 @@
           </a:p>
         </p:txBody>
       </p:sp>
+      <p:sp>
+        <p:nvSpPr>
+          <p:cNvPr id="90" name="文本框 89"/>
+          <p:cNvSpPr txBox="1"/>
+          <p:nvPr/>
+        </p:nvSpPr>
+        <p:spPr>
+          <a:xfrm>
+            <a:off x="710565" y="5728970"/>
+            <a:ext cx="1318260" cy="337185"/>
+          </a:xfrm>
+          <a:prstGeom prst="rect">
+            <a:avLst/>
+          </a:prstGeom>
+        </p:spPr>
+        <p:txBody>
+          <a:bodyPr wrap="square">
+            <a:spAutoFit/>
+            <a:extLst>
+              <a:ext uri="{4A0BC546-FE56-4ADE-93B0-CB8AF2F6F144}">
+                <wpsdc:textFrameExt xmlns:wpsdc="http://www.wps.cn/officeDocument/2022/drawingmlCustomData" type="text"/>
+              </a:ext>
+            </a:extLst>
+          </a:bodyPr>
+          <a:p>
+            <a:pPr indent="0" algn="l">
+              <a:buFont typeface="Wingdings" panose="05000000000000000000" charset="0"/>
+              <a:buNone/>
+            </a:pPr>
+            <a:r>
+              <a:rPr lang="en-US" altLang="zh-CN" sz="1600">
+                <a:latin typeface="Times New Roman" panose="02020603050405020304" charset="0"/>
+                <a:ea typeface="微软雅黑" panose="020B0503020204020204" charset="-122"/>
+                <a:cs typeface="Times New Roman" panose="02020603050405020304" charset="0"/>
+              </a:rPr>
+              <a:t>Confidence =  </a:t>
+            </a:r>
+            <a:endParaRPr lang="en-US" altLang="zh-CN" sz="1600">
+              <a:latin typeface="Times New Roman" panose="02020603050405020304" charset="0"/>
+              <a:ea typeface="微软雅黑" panose="020B0503020204020204" charset="-122"/>
+              <a:cs typeface="Times New Roman" panose="02020603050405020304" charset="0"/>
+            </a:endParaRPr>
+          </a:p>
+        </p:txBody>
+      </p:sp>
+      <p:graphicFrame>
+        <p:nvGraphicFramePr>
+          <p:cNvPr id="91" name="对象 90">
+            <a:hlinkClick r:id="" action="ppaction://ole?verb="/>
+          </p:cNvPr>
+          <p:cNvGraphicFramePr>
+            <a:graphicFrameLocks noChangeAspect="1"/>
+          </p:cNvGraphicFramePr>
+          <p:nvPr/>
+        </p:nvGraphicFramePr>
+        <p:xfrm>
+          <a:off x="1965960" y="5796915"/>
+          <a:ext cx="1645920" cy="269240"/>
+        </p:xfrm>
+        <a:graphic>
+          <a:graphicData uri="http://schemas.openxmlformats.org/presentationml/2006/ole">
+            <mc:AlternateContent xmlns:mc="http://schemas.openxmlformats.org/markup-compatibility/2006">
+              <mc:Choice xmlns:v="urn:schemas-microsoft-com:vml" Requires="v">
+                <p:oleObj spid="_x0000_s2050" name="" r:id="rId11" imgW="1320165" imgH="215900" progId="Equation.KSEE3">
+                  <p:embed/>
+                </p:oleObj>
+              </mc:Choice>
+              <mc:Fallback>
+                <p:oleObj name="" r:id="rId11" imgW="1320165" imgH="215900" progId="Equation.KSEE3">
+                  <p:embed/>
+                  <p:pic>
+                    <p:nvPicPr>
+                      <p:cNvPr id="0" name="图片 2049"/>
+                      <p:cNvPicPr/>
+                      <p:nvPr/>
+                    </p:nvPicPr>
+                    <p:blipFill>
+                      <a:blip r:embed="rId12"/>
+                      <a:stretch>
+                        <a:fillRect/>
+                      </a:stretch>
+                    </p:blipFill>
+                    <p:spPr>
+                      <a:xfrm>
+                        <a:off x="1965960" y="5796915"/>
+                        <a:ext cx="1645920" cy="269240"/>
+                      </a:xfrm>
+                      <a:prstGeom prst="rect">
+                        <a:avLst/>
+                      </a:prstGeom>
+                    </p:spPr>
+                  </p:pic>
+                </p:oleObj>
+              </mc:Fallback>
+            </mc:AlternateContent>
+          </a:graphicData>
+        </a:graphic>
+      </p:graphicFrame>
     </p:spTree>
   </p:cSld>
   <p:clrMapOvr>
@@ -9322,7 +9519,7 @@
         </p:nvSpPr>
         <p:spPr>
           <a:xfrm>
-            <a:off x="369570" y="4272915"/>
+            <a:off x="372110" y="3920490"/>
             <a:ext cx="1449705" cy="1427480"/>
           </a:xfrm>
           <a:prstGeom prst="rect">
@@ -9364,7 +9561,7 @@
         </p:nvCxnSpPr>
         <p:spPr>
           <a:xfrm>
-            <a:off x="369570" y="4504055"/>
+            <a:off x="372110" y="4151630"/>
             <a:ext cx="1449705" cy="0"/>
           </a:xfrm>
           <a:prstGeom prst="line">
@@ -9394,7 +9591,7 @@
         </p:nvCxnSpPr>
         <p:spPr>
           <a:xfrm>
-            <a:off x="369570" y="4707890"/>
+            <a:off x="372110" y="4355465"/>
             <a:ext cx="1449705" cy="0"/>
           </a:xfrm>
           <a:prstGeom prst="line">
@@ -9424,7 +9621,7 @@
         </p:nvCxnSpPr>
         <p:spPr>
           <a:xfrm>
-            <a:off x="369570" y="4911725"/>
+            <a:off x="372110" y="4559300"/>
             <a:ext cx="1449705" cy="0"/>
           </a:xfrm>
           <a:prstGeom prst="line">
@@ -9454,7 +9651,7 @@
         </p:nvCxnSpPr>
         <p:spPr>
           <a:xfrm>
-            <a:off x="369570" y="5523230"/>
+            <a:off x="372110" y="5170805"/>
             <a:ext cx="1449705" cy="0"/>
           </a:xfrm>
           <a:prstGeom prst="line">
@@ -9484,7 +9681,7 @@
         </p:nvCxnSpPr>
         <p:spPr>
           <a:xfrm>
-            <a:off x="369570" y="5115560"/>
+            <a:off x="372110" y="4763135"/>
             <a:ext cx="1449705" cy="0"/>
           </a:xfrm>
           <a:prstGeom prst="line">
@@ -9514,7 +9711,7 @@
         </p:nvCxnSpPr>
         <p:spPr>
           <a:xfrm>
-            <a:off x="369570" y="5319395"/>
+            <a:off x="372110" y="4966970"/>
             <a:ext cx="1449705" cy="0"/>
           </a:xfrm>
           <a:prstGeom prst="line">
@@ -9547,7 +9744,7 @@
         </p:nvCxnSpPr>
         <p:spPr>
           <a:xfrm>
-            <a:off x="1094740" y="4272915"/>
+            <a:off x="1097280" y="3920490"/>
             <a:ext cx="0" cy="1427480"/>
           </a:xfrm>
           <a:prstGeom prst="line">
@@ -9577,7 +9774,7 @@
         </p:nvCxnSpPr>
         <p:spPr>
           <a:xfrm>
-            <a:off x="598805" y="4272915"/>
+            <a:off x="601345" y="3920490"/>
             <a:ext cx="0" cy="1427480"/>
           </a:xfrm>
           <a:prstGeom prst="line">
@@ -9607,7 +9804,7 @@
         </p:nvCxnSpPr>
         <p:spPr>
           <a:xfrm>
-            <a:off x="809625" y="4272915"/>
+            <a:off x="812165" y="3920490"/>
             <a:ext cx="0" cy="1427480"/>
           </a:xfrm>
           <a:prstGeom prst="line">
@@ -9637,7 +9834,7 @@
         </p:nvCxnSpPr>
         <p:spPr>
           <a:xfrm>
-            <a:off x="1342390" y="4272915"/>
+            <a:off x="1344930" y="3920490"/>
             <a:ext cx="0" cy="1427480"/>
           </a:xfrm>
           <a:prstGeom prst="line">
@@ -9667,7 +9864,7 @@
         </p:nvCxnSpPr>
         <p:spPr>
           <a:xfrm>
-            <a:off x="1574165" y="4272915"/>
+            <a:off x="1576705" y="3920490"/>
             <a:ext cx="0" cy="1427480"/>
           </a:xfrm>
           <a:prstGeom prst="line">
@@ -9697,7 +9894,7 @@
         </p:nvSpPr>
         <p:spPr>
           <a:xfrm>
-            <a:off x="1861185" y="4025900"/>
+            <a:off x="1863725" y="3673475"/>
             <a:ext cx="342900" cy="2114550"/>
           </a:xfrm>
           <a:prstGeom prst="leftBrace">
@@ -9734,7 +9931,7 @@
         </p:nvSpPr>
         <p:spPr>
           <a:xfrm>
-            <a:off x="368935" y="3649980"/>
+            <a:off x="371475" y="3297555"/>
             <a:ext cx="1492250" cy="535305"/>
           </a:xfrm>
           <a:prstGeom prst="rect">
@@ -9776,7 +9973,7 @@
         </p:nvSpPr>
         <p:spPr>
           <a:xfrm>
-            <a:off x="2443480" y="4025900"/>
+            <a:off x="2446020" y="3673475"/>
             <a:ext cx="748665" cy="314960"/>
           </a:xfrm>
           <a:prstGeom prst="rect">
@@ -9829,7 +10026,7 @@
         </p:nvSpPr>
         <p:spPr>
           <a:xfrm>
-            <a:off x="3192145" y="4025900"/>
+            <a:off x="3194685" y="3673475"/>
             <a:ext cx="748665" cy="314960"/>
           </a:xfrm>
           <a:prstGeom prst="rect">
@@ -9878,7 +10075,7 @@
         </p:nvSpPr>
         <p:spPr>
           <a:xfrm>
-            <a:off x="2931795" y="3607435"/>
+            <a:off x="2934335" y="3255010"/>
             <a:ext cx="648970" cy="259080"/>
           </a:xfrm>
           <a:prstGeom prst="rect">
@@ -9920,7 +10117,7 @@
         </p:nvSpPr>
         <p:spPr>
           <a:xfrm>
-            <a:off x="2446020" y="4861560"/>
+            <a:off x="2448560" y="4509135"/>
             <a:ext cx="1497965" cy="595630"/>
           </a:xfrm>
           <a:prstGeom prst="rect">
@@ -9969,7 +10166,7 @@
         </p:nvSpPr>
         <p:spPr>
           <a:xfrm>
-            <a:off x="2446020" y="5457190"/>
+            <a:off x="2448560" y="5104765"/>
             <a:ext cx="1497965" cy="595630"/>
           </a:xfrm>
           <a:prstGeom prst="rect">
@@ -10018,7 +10215,7 @@
         </p:nvSpPr>
         <p:spPr>
           <a:xfrm>
-            <a:off x="2710815" y="4560570"/>
+            <a:off x="2713355" y="4208145"/>
             <a:ext cx="967740" cy="259080"/>
           </a:xfrm>
           <a:prstGeom prst="rect">
@@ -10060,7 +10257,7 @@
         </p:nvCxnSpPr>
         <p:spPr>
           <a:xfrm>
-            <a:off x="4018280" y="4183380"/>
+            <a:off x="4020820" y="3830955"/>
             <a:ext cx="643890" cy="5715"/>
           </a:xfrm>
           <a:prstGeom prst="straightConnector1">
@@ -10093,7 +10290,7 @@
         </p:nvCxnSpPr>
         <p:spPr>
           <a:xfrm>
-            <a:off x="4021455" y="5451475"/>
+            <a:off x="4023995" y="5099050"/>
             <a:ext cx="643890" cy="5715"/>
           </a:xfrm>
           <a:prstGeom prst="straightConnector1">
@@ -10126,7 +10323,7 @@
         </p:nvSpPr>
         <p:spPr>
           <a:xfrm>
-            <a:off x="3940810" y="3866515"/>
+            <a:off x="3943350" y="3514090"/>
             <a:ext cx="819785" cy="274320"/>
           </a:xfrm>
           <a:prstGeom prst="rect">
@@ -10168,7 +10365,7 @@
         </p:nvSpPr>
         <p:spPr>
           <a:xfrm>
-            <a:off x="3940810" y="5177155"/>
+            <a:off x="3943350" y="4824730"/>
             <a:ext cx="819785" cy="274320"/>
           </a:xfrm>
           <a:prstGeom prst="rect">
@@ -10747,7 +10944,7 @@
           <a:graphicData uri="http://schemas.openxmlformats.org/presentationml/2006/ole">
             <mc:AlternateContent xmlns:mc="http://schemas.openxmlformats.org/markup-compatibility/2006">
               <mc:Choice xmlns:v="urn:schemas-microsoft-com:vml" Requires="v">
-                <p:oleObj spid="_x0000_s2049" name="" r:id="rId8" imgW="127000" imgH="279400" progId="Equation.KSEE3">
+                <p:oleObj spid="_x0000_s3" name="" r:id="rId8" imgW="127000" imgH="279400" progId="Equation.KSEE3">
                   <p:embed/>
                 </p:oleObj>
               </mc:Choice>
@@ -10835,104 +11032,6 @@
           </a:graphicData>
         </a:graphic>
       </p:graphicFrame>
-      <p:sp>
-        <p:nvSpPr>
-          <p:cNvPr id="90" name="文本框 89"/>
-          <p:cNvSpPr txBox="1"/>
-          <p:nvPr/>
-        </p:nvSpPr>
-        <p:spPr>
-          <a:xfrm>
-            <a:off x="382905" y="2771140"/>
-            <a:ext cx="1318260" cy="337185"/>
-          </a:xfrm>
-          <a:prstGeom prst="rect">
-            <a:avLst/>
-          </a:prstGeom>
-        </p:spPr>
-        <p:txBody>
-          <a:bodyPr wrap="square">
-            <a:spAutoFit/>
-            <a:extLst>
-              <a:ext uri="{4A0BC546-FE56-4ADE-93B0-CB8AF2F6F144}">
-                <wpsdc:textFrameExt xmlns:wpsdc="http://www.wps.cn/officeDocument/2022/drawingmlCustomData" type="text"/>
-              </a:ext>
-            </a:extLst>
-          </a:bodyPr>
-          <a:p>
-            <a:pPr indent="0" algn="l">
-              <a:buFont typeface="Wingdings" panose="05000000000000000000" charset="0"/>
-              <a:buNone/>
-            </a:pPr>
-            <a:r>
-              <a:rPr lang="en-US" altLang="zh-CN" sz="1600">
-                <a:latin typeface="Times New Roman" panose="02020603050405020304" charset="0"/>
-                <a:ea typeface="微软雅黑" panose="020B0503020204020204" charset="-122"/>
-                <a:cs typeface="Times New Roman" panose="02020603050405020304" charset="0"/>
-              </a:rPr>
-              <a:t>Confidence =  </a:t>
-            </a:r>
-            <a:endParaRPr lang="en-US" altLang="zh-CN" sz="1600">
-              <a:latin typeface="Times New Roman" panose="02020603050405020304" charset="0"/>
-              <a:ea typeface="微软雅黑" panose="020B0503020204020204" charset="-122"/>
-              <a:cs typeface="Times New Roman" panose="02020603050405020304" charset="0"/>
-            </a:endParaRPr>
-          </a:p>
-        </p:txBody>
-      </p:sp>
-      <p:graphicFrame>
-        <p:nvGraphicFramePr>
-          <p:cNvPr id="91" name="对象 90">
-            <a:hlinkClick r:id="" action="ppaction://ole?verb="/>
-          </p:cNvPr>
-          <p:cNvGraphicFramePr>
-            <a:graphicFrameLocks noChangeAspect="1"/>
-          </p:cNvGraphicFramePr>
-          <p:nvPr/>
-        </p:nvGraphicFramePr>
-        <p:xfrm>
-          <a:off x="1638300" y="2839085"/>
-          <a:ext cx="1645920" cy="269240"/>
-        </p:xfrm>
-        <a:graphic>
-          <a:graphicData uri="http://schemas.openxmlformats.org/presentationml/2006/ole">
-            <mc:AlternateContent xmlns:mc="http://schemas.openxmlformats.org/markup-compatibility/2006">
-              <mc:Choice xmlns:v="urn:schemas-microsoft-com:vml" Requires="v">
-                <p:oleObj spid="_x0000_s2050" name="" r:id="rId12" imgW="1320165" imgH="215900" progId="Equation.KSEE3">
-                  <p:embed/>
-                </p:oleObj>
-              </mc:Choice>
-              <mc:Fallback>
-                <p:oleObj name="" r:id="rId12" imgW="1320165" imgH="215900" progId="Equation.KSEE3">
-                  <p:embed/>
-                  <p:pic>
-                    <p:nvPicPr>
-                      <p:cNvPr id="0" name="图片 2049"/>
-                      <p:cNvPicPr/>
-                      <p:nvPr/>
-                    </p:nvPicPr>
-                    <p:blipFill>
-                      <a:blip r:embed="rId13"/>
-                      <a:stretch>
-                        <a:fillRect/>
-                      </a:stretch>
-                    </p:blipFill>
-                    <p:spPr>
-                      <a:xfrm>
-                        <a:off x="1638300" y="2839085"/>
-                        <a:ext cx="1645920" cy="269240"/>
-                      </a:xfrm>
-                      <a:prstGeom prst="rect">
-                        <a:avLst/>
-                      </a:prstGeom>
-                    </p:spPr>
-                  </p:pic>
-                </p:oleObj>
-              </mc:Fallback>
-            </mc:AlternateContent>
-          </a:graphicData>
-        </a:graphic>
-      </p:graphicFrame>
       <p:cxnSp>
         <p:nvCxnSpPr>
           <p:cNvPr id="92" name="直接箭头连接符 91"/>
@@ -11036,12 +11135,12 @@
           <a:graphicData uri="http://schemas.openxmlformats.org/presentationml/2006/ole">
             <mc:AlternateContent xmlns:mc="http://schemas.openxmlformats.org/markup-compatibility/2006">
               <mc:Choice xmlns:v="urn:schemas-microsoft-com:vml" Requires="v">
-                <p:oleObj spid="_x0000_s95" name="" r:id="rId14" imgW="139700" imgH="177165" progId="Equation.KSEE3">
+                <p:oleObj spid="_x0000_s95" name="" r:id="rId12" imgW="139700" imgH="177165" progId="Equation.KSEE3">
                   <p:embed/>
                 </p:oleObj>
               </mc:Choice>
               <mc:Fallback>
-                <p:oleObj name="" r:id="rId14" imgW="139700" imgH="177165" progId="Equation.KSEE3">
+                <p:oleObj name="" r:id="rId12" imgW="139700" imgH="177165" progId="Equation.KSEE3">
                   <p:embed/>
                   <p:pic>
                     <p:nvPicPr>
@@ -11050,7 +11149,7 @@
                       <p:nvPr/>
                     </p:nvPicPr>
                     <p:blipFill>
-                      <a:blip r:embed="rId15"/>
+                      <a:blip r:embed="rId13"/>
                       <a:stretch>
                         <a:fillRect/>
                       </a:stretch>
@@ -11089,12 +11188,12 @@
           <a:graphicData uri="http://schemas.openxmlformats.org/presentationml/2006/ole">
             <mc:AlternateContent xmlns:mc="http://schemas.openxmlformats.org/markup-compatibility/2006">
               <mc:Choice xmlns:v="urn:schemas-microsoft-com:vml" Requires="v">
-                <p:oleObj spid="_x0000_s97" name="" r:id="rId16" imgW="127000" imgH="177165" progId="Equation.KSEE3">
+                <p:oleObj spid="_x0000_s97" name="" r:id="rId14" imgW="127000" imgH="177165" progId="Equation.KSEE3">
                   <p:embed/>
                 </p:oleObj>
               </mc:Choice>
               <mc:Fallback>
-                <p:oleObj name="" r:id="rId16" imgW="127000" imgH="177165" progId="Equation.KSEE3">
+                <p:oleObj name="" r:id="rId14" imgW="127000" imgH="177165" progId="Equation.KSEE3">
                   <p:embed/>
                   <p:pic>
                     <p:nvPicPr>
@@ -11103,7 +11202,7 @@
                       <p:nvPr/>
                     </p:nvPicPr>
                     <p:blipFill>
-                      <a:blip r:embed="rId17"/>
+                      <a:blip r:embed="rId15"/>
                       <a:stretch>
                         <a:fillRect/>
                       </a:stretch>
@@ -11142,12 +11241,12 @@
           <a:graphicData uri="http://schemas.openxmlformats.org/presentationml/2006/ole">
             <mc:AlternateContent xmlns:mc="http://schemas.openxmlformats.org/markup-compatibility/2006">
               <mc:Choice xmlns:v="urn:schemas-microsoft-com:vml" Requires="v">
-                <p:oleObj spid="_x0000_s99" name="" r:id="rId18" imgW="114300" imgH="139700" progId="Equation.KSEE3">
+                <p:oleObj spid="_x0000_s99" name="" r:id="rId16" imgW="114300" imgH="139700" progId="Equation.KSEE3">
                   <p:embed/>
                 </p:oleObj>
               </mc:Choice>
               <mc:Fallback>
-                <p:oleObj name="" r:id="rId18" imgW="114300" imgH="139700" progId="Equation.KSEE3">
+                <p:oleObj name="" r:id="rId16" imgW="114300" imgH="139700" progId="Equation.KSEE3">
                   <p:embed/>
                   <p:pic>
                     <p:nvPicPr>
@@ -11156,7 +11255,7 @@
                       <p:nvPr/>
                     </p:nvPicPr>
                     <p:blipFill>
-                      <a:blip r:embed="rId19"/>
+                      <a:blip r:embed="rId17"/>
                       <a:stretch>
                         <a:fillRect/>
                       </a:stretch>
@@ -11631,7 +11730,7 @@
           <p:cNvGraphicFramePr/>
           <p:nvPr>
             <p:custDataLst>
-              <p:tags r:id="rId20"/>
+              <p:tags r:id="rId18"/>
             </p:custDataLst>
           </p:nvPr>
         </p:nvGraphicFramePr>
@@ -12143,7 +12242,15 @@
                 <a:ea typeface="Kaiti TC" panose="02010600040101010101" pitchFamily="2" charset="-120"/>
                 <a:cs typeface="Times New Roman" panose="02020603050405020304" charset="0"/>
               </a:rPr>
-              <a:t>Model</a:t>
+              <a:t>T</a:t>
+            </a:r>
+            <a:r>
+              <a:rPr lang="en-US" altLang="en-US" sz="4000" dirty="0">
+                <a:latin typeface="Times New Roman" panose="02020603050405020304" charset="0"/>
+                <a:ea typeface="Kaiti TC" panose="02010600040101010101" pitchFamily="2" charset="-120"/>
+                <a:cs typeface="Times New Roman" panose="02020603050405020304" charset="0"/>
+              </a:rPr>
+              <a:t>est</a:t>
             </a:r>
             <a:endParaRPr lang="en-US" altLang="en-US" sz="4000" dirty="0">
               <a:latin typeface="Times New Roman" panose="02020603050405020304" charset="0"/>
@@ -12698,7 +12805,7 @@
         <p:spPr>
           <a:xfrm>
             <a:off x="1083945" y="2451735"/>
-            <a:ext cx="486410" cy="292735"/>
+            <a:ext cx="702945" cy="240030"/>
           </a:xfrm>
           <a:prstGeom prst="line">
             <a:avLst/>
@@ -13231,8 +13338,8 @@
         </p:nvCxnSpPr>
         <p:spPr>
           <a:xfrm>
-            <a:off x="1031240" y="2481580"/>
-            <a:ext cx="2789555" cy="1278890"/>
+            <a:off x="916940" y="2527935"/>
+            <a:ext cx="2958465" cy="1248410"/>
           </a:xfrm>
           <a:prstGeom prst="line">
             <a:avLst/>
@@ -13509,7 +13616,7 @@
                 <a:ea typeface="微软雅黑" panose="020B0503020204020204" charset="-122"/>
                 <a:cs typeface="Times New Roman" panose="02020603050405020304" charset="0"/>
               </a:rPr>
-              <a:t>s coordination of  N1 and transmit it to N1;</a:t>
+              <a:t>s coordinate of  N1 and transmit it to N1;</a:t>
             </a:r>
             <a:endParaRPr lang="en-US" altLang="zh-CN" sz="1800">
               <a:latin typeface="Times New Roman" panose="02020603050405020304" charset="0"/>
@@ -13525,7 +13632,7 @@
                 <a:ea typeface="微软雅黑" panose="020B0503020204020204" charset="-122"/>
                 <a:cs typeface="Times New Roman" panose="02020603050405020304" charset="0"/>
               </a:rPr>
-              <a:t>5. N1 opperates as anchor node and repeat step 2-4 until target node get its coordination.</a:t>
+              <a:t>5. N1 opperates as anchor node and repeat step 2-4 until target node get its coordinate.</a:t>
             </a:r>
             <a:endParaRPr lang="en-US" altLang="zh-CN" sz="1800">
               <a:latin typeface="Times New Roman" panose="02020603050405020304" charset="0"/>
@@ -13591,7 +13698,7 @@
                 <a:ea typeface="微软雅黑" panose="020B0503020204020204" charset="-122"/>
                 <a:cs typeface="Times New Roman" panose="02020603050405020304" charset="0"/>
               </a:rPr>
-              <a:t>How to compute coordination of next node?</a:t>
+              <a:t>How to compute coordinate of next node?</a:t>
             </a:r>
             <a:endParaRPr lang="en-US" altLang="zh-CN" sz="1800">
               <a:latin typeface="Times New Roman" panose="02020603050405020304" charset="0"/>
@@ -13717,9 +13824,9 @@
           <p:nvPr/>
         </p:nvCxnSpPr>
         <p:spPr>
-          <a:xfrm flipV="1">
+          <a:xfrm flipH="1" flipV="1">
             <a:off x="6057900" y="4297680"/>
-            <a:ext cx="0" cy="1854835"/>
+            <a:ext cx="3175" cy="727710"/>
           </a:xfrm>
           <a:prstGeom prst="line">
             <a:avLst/>
@@ -13740,6 +13847,715 @@
           </a:fontRef>
         </p:style>
       </p:cxnSp>
+      <p:pic>
+        <p:nvPicPr>
+          <p:cNvPr id="3" name="图片 2" descr="电子设备"/>
+          <p:cNvPicPr>
+            <a:picLocks noChangeAspect="1"/>
+          </p:cNvPicPr>
+          <p:nvPr>
+            <p:custDataLst>
+              <p:tags r:id="rId15"/>
+            </p:custDataLst>
+          </p:nvPr>
+        </p:nvPicPr>
+        <p:blipFill>
+          <a:blip r:embed="rId16">
+            <a:extLst>
+              <a:ext uri="{96DAC541-7B7A-43D3-8B79-37D633B846F1}">
+                <asvg:svgBlip xmlns:asvg="http://schemas.microsoft.com/office/drawing/2016/SVG/main" r:embed="rId7"/>
+              </a:ext>
+            </a:extLst>
+          </a:blip>
+          <a:stretch>
+            <a:fillRect/>
+          </a:stretch>
+        </p:blipFill>
+        <p:spPr>
+          <a:xfrm>
+            <a:off x="7933690" y="4666615"/>
+            <a:ext cx="362585" cy="362585"/>
+          </a:xfrm>
+          <a:prstGeom prst="rect">
+            <a:avLst/>
+          </a:prstGeom>
+        </p:spPr>
+      </p:pic>
+      <p:cxnSp>
+        <p:nvCxnSpPr>
+          <p:cNvPr id="5" name="直接连接符 4"/>
+          <p:cNvCxnSpPr>
+            <a:stCxn id="44" idx="3"/>
+            <a:endCxn id="3" idx="1"/>
+          </p:cNvCxnSpPr>
+          <p:nvPr/>
+        </p:nvCxnSpPr>
+        <p:spPr>
+          <a:xfrm flipV="1">
+            <a:off x="7094220" y="4848225"/>
+            <a:ext cx="839470" cy="938530"/>
+          </a:xfrm>
+          <a:prstGeom prst="line">
+            <a:avLst/>
+          </a:prstGeom>
+        </p:spPr>
+        <p:style>
+          <a:lnRef idx="2">
+            <a:schemeClr val="accent1"/>
+          </a:lnRef>
+          <a:fillRef idx="0">
+            <a:srgbClr val="FFFFFF"/>
+          </a:fillRef>
+          <a:effectRef idx="0">
+            <a:srgbClr val="FFFFFF"/>
+          </a:effectRef>
+          <a:fontRef idx="minor">
+            <a:schemeClr val="tx1"/>
+          </a:fontRef>
+        </p:style>
+      </p:cxnSp>
+      <p:graphicFrame>
+        <p:nvGraphicFramePr>
+          <p:cNvPr id="6" name="对象 5">
+            <a:hlinkClick r:id="" action="ppaction://ole?verb="/>
+          </p:cNvPr>
+          <p:cNvGraphicFramePr>
+            <a:graphicFrameLocks noChangeAspect="1"/>
+          </p:cNvGraphicFramePr>
+          <p:nvPr/>
+        </p:nvGraphicFramePr>
+        <p:xfrm>
+          <a:off x="5624195" y="4927600"/>
+          <a:ext cx="209550" cy="297180"/>
+        </p:xfrm>
+        <a:graphic>
+          <a:graphicData uri="http://schemas.openxmlformats.org/presentationml/2006/ole">
+            <mc:AlternateContent xmlns:mc="http://schemas.openxmlformats.org/markup-compatibility/2006">
+              <mc:Choice xmlns:v="urn:schemas-microsoft-com:vml" Requires="v">
+                <p:oleObj spid="_x0000_s1025" name="" r:id="rId17" imgW="152400" imgH="215900" progId="Equation.KSEE3">
+                  <p:embed/>
+                </p:oleObj>
+              </mc:Choice>
+              <mc:Fallback>
+                <p:oleObj name="" r:id="rId17" imgW="152400" imgH="215900" progId="Equation.KSEE3">
+                  <p:embed/>
+                  <p:pic>
+                    <p:nvPicPr>
+                      <p:cNvPr id="0" name="图片 1024"/>
+                      <p:cNvPicPr/>
+                      <p:nvPr/>
+                    </p:nvPicPr>
+                    <p:blipFill>
+                      <a:blip r:embed="rId18"/>
+                      <a:stretch>
+                        <a:fillRect/>
+                      </a:stretch>
+                    </p:blipFill>
+                    <p:spPr>
+                      <a:xfrm>
+                        <a:off x="5624195" y="4927600"/>
+                        <a:ext cx="209550" cy="297180"/>
+                      </a:xfrm>
+                      <a:prstGeom prst="rect">
+                        <a:avLst/>
+                      </a:prstGeom>
+                    </p:spPr>
+                  </p:pic>
+                </p:oleObj>
+              </mc:Fallback>
+            </mc:AlternateContent>
+          </a:graphicData>
+        </a:graphic>
+      </p:graphicFrame>
+      <p:graphicFrame>
+        <p:nvGraphicFramePr>
+          <p:cNvPr id="10" name="对象 9">
+            <a:hlinkClick r:id="" action="ppaction://ole?verb="/>
+          </p:cNvPr>
+          <p:cNvGraphicFramePr>
+            <a:graphicFrameLocks noChangeAspect="1"/>
+          </p:cNvGraphicFramePr>
+          <p:nvPr/>
+        </p:nvGraphicFramePr>
+        <p:xfrm>
+          <a:off x="7239318" y="5539105"/>
+          <a:ext cx="268605" cy="353695"/>
+        </p:xfrm>
+        <a:graphic>
+          <a:graphicData uri="http://schemas.openxmlformats.org/presentationml/2006/ole">
+            <mc:AlternateContent xmlns:mc="http://schemas.openxmlformats.org/markup-compatibility/2006">
+              <mc:Choice xmlns:v="urn:schemas-microsoft-com:vml" Requires="v">
+                <p:oleObj spid="_x0000_s20" name="" r:id="rId19" imgW="165100" imgH="215900" progId="Equation.KSEE3">
+                  <p:embed/>
+                </p:oleObj>
+              </mc:Choice>
+              <mc:Fallback>
+                <p:oleObj name="" r:id="rId19" imgW="165100" imgH="215900" progId="Equation.KSEE3">
+                  <p:embed/>
+                  <p:pic>
+                    <p:nvPicPr>
+                      <p:cNvPr id="0" name="图片 1024"/>
+                      <p:cNvPicPr/>
+                      <p:nvPr/>
+                    </p:nvPicPr>
+                    <p:blipFill>
+                      <a:blip r:embed="rId20"/>
+                      <a:stretch>
+                        <a:fillRect/>
+                      </a:stretch>
+                    </p:blipFill>
+                    <p:spPr>
+                      <a:xfrm>
+                        <a:off x="7239318" y="5539105"/>
+                        <a:ext cx="268605" cy="353695"/>
+                      </a:xfrm>
+                      <a:prstGeom prst="rect">
+                        <a:avLst/>
+                      </a:prstGeom>
+                    </p:spPr>
+                  </p:pic>
+                </p:oleObj>
+              </mc:Fallback>
+            </mc:AlternateContent>
+          </a:graphicData>
+        </a:graphic>
+      </p:graphicFrame>
+      <p:cxnSp>
+        <p:nvCxnSpPr>
+          <p:cNvPr id="42" name="直接连接符 41"/>
+          <p:cNvCxnSpPr/>
+          <p:nvPr/>
+        </p:nvCxnSpPr>
+        <p:spPr>
+          <a:xfrm>
+            <a:off x="6377305" y="5892800"/>
+            <a:ext cx="1802765" cy="12700"/>
+          </a:xfrm>
+          <a:prstGeom prst="line">
+            <a:avLst/>
+          </a:prstGeom>
+        </p:spPr>
+        <p:style>
+          <a:lnRef idx="2">
+            <a:schemeClr val="accent1"/>
+          </a:lnRef>
+          <a:fillRef idx="0">
+            <a:srgbClr val="FFFFFF"/>
+          </a:fillRef>
+          <a:effectRef idx="0">
+            <a:srgbClr val="FFFFFF"/>
+          </a:effectRef>
+          <a:fontRef idx="minor">
+            <a:schemeClr val="tx1"/>
+          </a:fontRef>
+        </p:style>
+      </p:cxnSp>
+      <p:graphicFrame>
+        <p:nvGraphicFramePr>
+          <p:cNvPr id="48" name="对象 47">
+            <a:hlinkClick r:id="" action="ppaction://ole?verb="/>
+          </p:cNvPr>
+          <p:cNvGraphicFramePr>
+            <a:graphicFrameLocks noChangeAspect="1"/>
+          </p:cNvGraphicFramePr>
+          <p:nvPr/>
+        </p:nvGraphicFramePr>
+        <p:xfrm>
+          <a:off x="7512686" y="5224780"/>
+          <a:ext cx="288290" cy="353695"/>
+        </p:xfrm>
+        <a:graphic>
+          <a:graphicData uri="http://schemas.openxmlformats.org/presentationml/2006/ole">
+            <mc:AlternateContent xmlns:mc="http://schemas.openxmlformats.org/markup-compatibility/2006">
+              <mc:Choice xmlns:v="urn:schemas-microsoft-com:vml" Requires="v">
+                <p:oleObj spid="_x0000_s49" name="" r:id="rId21" imgW="177165" imgH="215900" progId="Equation.KSEE3">
+                  <p:embed/>
+                </p:oleObj>
+              </mc:Choice>
+              <mc:Fallback>
+                <p:oleObj name="" r:id="rId21" imgW="177165" imgH="215900" progId="Equation.KSEE3">
+                  <p:embed/>
+                  <p:pic>
+                    <p:nvPicPr>
+                      <p:cNvPr id="0" name="图片 1024"/>
+                      <p:cNvPicPr/>
+                      <p:nvPr/>
+                    </p:nvPicPr>
+                    <p:blipFill>
+                      <a:blip r:embed="rId22"/>
+                      <a:stretch>
+                        <a:fillRect/>
+                      </a:stretch>
+                    </p:blipFill>
+                    <p:spPr>
+                      <a:xfrm>
+                        <a:off x="7512686" y="5224780"/>
+                        <a:ext cx="288290" cy="353695"/>
+                      </a:xfrm>
+                      <a:prstGeom prst="rect">
+                        <a:avLst/>
+                      </a:prstGeom>
+                    </p:spPr>
+                  </p:pic>
+                </p:oleObj>
+              </mc:Fallback>
+            </mc:AlternateContent>
+          </a:graphicData>
+        </a:graphic>
+      </p:graphicFrame>
+      <p:graphicFrame>
+        <p:nvGraphicFramePr>
+          <p:cNvPr id="50" name="对象 49">
+            <a:hlinkClick r:id="" action="ppaction://ole?verb="/>
+          </p:cNvPr>
+          <p:cNvGraphicFramePr>
+            <a:graphicFrameLocks noChangeAspect="1"/>
+          </p:cNvGraphicFramePr>
+          <p:nvPr/>
+        </p:nvGraphicFramePr>
+        <p:xfrm>
+          <a:off x="6452871" y="5045075"/>
+          <a:ext cx="269240" cy="353695"/>
+        </p:xfrm>
+        <a:graphic>
+          <a:graphicData uri="http://schemas.openxmlformats.org/presentationml/2006/ole">
+            <mc:AlternateContent xmlns:mc="http://schemas.openxmlformats.org/markup-compatibility/2006">
+              <mc:Choice xmlns:v="urn:schemas-microsoft-com:vml" Requires="v">
+                <p:oleObj spid="_x0000_s51" name="" r:id="rId23" imgW="165100" imgH="215900" progId="Equation.KSEE3">
+                  <p:embed/>
+                </p:oleObj>
+              </mc:Choice>
+              <mc:Fallback>
+                <p:oleObj name="" r:id="rId23" imgW="165100" imgH="215900" progId="Equation.KSEE3">
+                  <p:embed/>
+                  <p:pic>
+                    <p:nvPicPr>
+                      <p:cNvPr id="0" name="图片 1024"/>
+                      <p:cNvPicPr/>
+                      <p:nvPr/>
+                    </p:nvPicPr>
+                    <p:blipFill>
+                      <a:blip r:embed="rId24"/>
+                      <a:stretch>
+                        <a:fillRect/>
+                      </a:stretch>
+                    </p:blipFill>
+                    <p:spPr>
+                      <a:xfrm>
+                        <a:off x="6452871" y="5045075"/>
+                        <a:ext cx="269240" cy="353695"/>
+                      </a:xfrm>
+                      <a:prstGeom prst="rect">
+                        <a:avLst/>
+                      </a:prstGeom>
+                    </p:spPr>
+                  </p:pic>
+                </p:oleObj>
+              </mc:Fallback>
+            </mc:AlternateContent>
+          </a:graphicData>
+        </a:graphic>
+      </p:graphicFrame>
+      <p:graphicFrame>
+        <p:nvGraphicFramePr>
+          <p:cNvPr id="52" name="对象 51">
+            <a:hlinkClick r:id="" action="ppaction://ole?verb="/>
+          </p:cNvPr>
+          <p:cNvGraphicFramePr>
+            <a:graphicFrameLocks noChangeAspect="1"/>
+          </p:cNvGraphicFramePr>
+          <p:nvPr/>
+        </p:nvGraphicFramePr>
+        <p:xfrm>
+          <a:off x="6256655" y="4513580"/>
+          <a:ext cx="465455" cy="275590"/>
+        </p:xfrm>
+        <a:graphic>
+          <a:graphicData uri="http://schemas.openxmlformats.org/presentationml/2006/ole">
+            <mc:AlternateContent xmlns:mc="http://schemas.openxmlformats.org/markup-compatibility/2006">
+              <mc:Choice xmlns:v="urn:schemas-microsoft-com:vml" Requires="v">
+                <p:oleObj spid="_x0000_s1026" name="" r:id="rId25" imgW="342900" imgH="203200" progId="Equation.KSEE3">
+                  <p:embed/>
+                </p:oleObj>
+              </mc:Choice>
+              <mc:Fallback>
+                <p:oleObj name="" r:id="rId25" imgW="342900" imgH="203200" progId="Equation.KSEE3">
+                  <p:embed/>
+                  <p:pic>
+                    <p:nvPicPr>
+                      <p:cNvPr id="0" name="图片 1025"/>
+                      <p:cNvPicPr/>
+                      <p:nvPr/>
+                    </p:nvPicPr>
+                    <p:blipFill>
+                      <a:blip r:embed="rId26"/>
+                      <a:stretch>
+                        <a:fillRect/>
+                      </a:stretch>
+                    </p:blipFill>
+                    <p:spPr>
+                      <a:xfrm>
+                        <a:off x="6256655" y="4513580"/>
+                        <a:ext cx="465455" cy="275590"/>
+                      </a:xfrm>
+                      <a:prstGeom prst="rect">
+                        <a:avLst/>
+                      </a:prstGeom>
+                    </p:spPr>
+                  </p:pic>
+                </p:oleObj>
+              </mc:Fallback>
+            </mc:AlternateContent>
+          </a:graphicData>
+        </a:graphic>
+      </p:graphicFrame>
+      <p:graphicFrame>
+        <p:nvGraphicFramePr>
+          <p:cNvPr id="53" name="对象 52">
+            <a:hlinkClick r:id="" action="ppaction://ole?verb="/>
+          </p:cNvPr>
+          <p:cNvGraphicFramePr>
+            <a:graphicFrameLocks noChangeAspect="1"/>
+          </p:cNvGraphicFramePr>
+          <p:nvPr/>
+        </p:nvGraphicFramePr>
+        <p:xfrm>
+          <a:off x="8688705" y="4142105"/>
+          <a:ext cx="1360805" cy="838835"/>
+        </p:xfrm>
+        <a:graphic>
+          <a:graphicData uri="http://schemas.openxmlformats.org/presentationml/2006/ole">
+            <mc:AlternateContent xmlns:mc="http://schemas.openxmlformats.org/markup-compatibility/2006">
+              <mc:Choice xmlns:v="urn:schemas-microsoft-com:vml" Requires="v">
+                <p:oleObj spid="_x0000_s1027" name="" r:id="rId27" imgW="1028700" imgH="634365" progId="Equation.KSEE3">
+                  <p:embed/>
+                </p:oleObj>
+              </mc:Choice>
+              <mc:Fallback>
+                <p:oleObj name="" r:id="rId27" imgW="1028700" imgH="634365" progId="Equation.KSEE3">
+                  <p:embed/>
+                  <p:pic>
+                    <p:nvPicPr>
+                      <p:cNvPr id="0" name="图片 1026"/>
+                      <p:cNvPicPr/>
+                      <p:nvPr/>
+                    </p:nvPicPr>
+                    <p:blipFill>
+                      <a:blip r:embed="rId28"/>
+                      <a:stretch>
+                        <a:fillRect/>
+                      </a:stretch>
+                    </p:blipFill>
+                    <p:spPr>
+                      <a:xfrm>
+                        <a:off x="8688705" y="4142105"/>
+                        <a:ext cx="1360805" cy="838835"/>
+                      </a:xfrm>
+                      <a:prstGeom prst="rect">
+                        <a:avLst/>
+                      </a:prstGeom>
+                    </p:spPr>
+                  </p:pic>
+                </p:oleObj>
+              </mc:Fallback>
+            </mc:AlternateContent>
+          </a:graphicData>
+        </a:graphic>
+      </p:graphicFrame>
+      <p:graphicFrame>
+        <p:nvGraphicFramePr>
+          <p:cNvPr id="54" name="对象 53">
+            <a:hlinkClick r:id="" action="ppaction://ole?verb="/>
+          </p:cNvPr>
+          <p:cNvGraphicFramePr>
+            <a:graphicFrameLocks noChangeAspect="1"/>
+          </p:cNvGraphicFramePr>
+          <p:nvPr/>
+        </p:nvGraphicFramePr>
+        <p:xfrm>
+          <a:off x="10423843" y="4254500"/>
+          <a:ext cx="1416685" cy="673100"/>
+        </p:xfrm>
+        <a:graphic>
+          <a:graphicData uri="http://schemas.openxmlformats.org/presentationml/2006/ole">
+            <mc:AlternateContent xmlns:mc="http://schemas.openxmlformats.org/markup-compatibility/2006">
+              <mc:Choice xmlns:v="urn:schemas-microsoft-com:vml" Requires="v">
+                <p:oleObj spid="_x0000_s1028" name="" r:id="rId29" imgW="1016000" imgH="482600" progId="Equation.KSEE3">
+                  <p:embed/>
+                </p:oleObj>
+              </mc:Choice>
+              <mc:Fallback>
+                <p:oleObj name="" r:id="rId29" imgW="1016000" imgH="482600" progId="Equation.KSEE3">
+                  <p:embed/>
+                  <p:pic>
+                    <p:nvPicPr>
+                      <p:cNvPr id="0" name="图片 1027"/>
+                      <p:cNvPicPr/>
+                      <p:nvPr/>
+                    </p:nvPicPr>
+                    <p:blipFill>
+                      <a:blip r:embed="rId30"/>
+                      <a:stretch>
+                        <a:fillRect/>
+                      </a:stretch>
+                    </p:blipFill>
+                    <p:spPr>
+                      <a:xfrm>
+                        <a:off x="10423843" y="4254500"/>
+                        <a:ext cx="1416685" cy="673100"/>
+                      </a:xfrm>
+                      <a:prstGeom prst="rect">
+                        <a:avLst/>
+                      </a:prstGeom>
+                    </p:spPr>
+                  </p:pic>
+                </p:oleObj>
+              </mc:Fallback>
+            </mc:AlternateContent>
+          </a:graphicData>
+        </a:graphic>
+      </p:graphicFrame>
+      <p:graphicFrame>
+        <p:nvGraphicFramePr>
+          <p:cNvPr id="55" name="对象 54">
+            <a:hlinkClick r:id="" action="ppaction://ole?verb="/>
+          </p:cNvPr>
+          <p:cNvGraphicFramePr>
+            <a:graphicFrameLocks noChangeAspect="1"/>
+          </p:cNvGraphicFramePr>
+          <p:nvPr/>
+        </p:nvGraphicFramePr>
+        <p:xfrm>
+          <a:off x="8672195" y="5240020"/>
+          <a:ext cx="2106295" cy="665480"/>
+        </p:xfrm>
+        <a:graphic>
+          <a:graphicData uri="http://schemas.openxmlformats.org/presentationml/2006/ole">
+            <mc:AlternateContent xmlns:mc="http://schemas.openxmlformats.org/markup-compatibility/2006">
+              <mc:Choice xmlns:v="urn:schemas-microsoft-com:vml" Requires="v">
+                <p:oleObj spid="_x0000_s1029" name="" r:id="rId31" imgW="1447800" imgH="457200" progId="Equation.KSEE3">
+                  <p:embed/>
+                </p:oleObj>
+              </mc:Choice>
+              <mc:Fallback>
+                <p:oleObj name="" r:id="rId31" imgW="1447800" imgH="457200" progId="Equation.KSEE3">
+                  <p:embed/>
+                  <p:pic>
+                    <p:nvPicPr>
+                      <p:cNvPr id="0" name="图片 1028"/>
+                      <p:cNvPicPr/>
+                      <p:nvPr/>
+                    </p:nvPicPr>
+                    <p:blipFill>
+                      <a:blip r:embed="rId32"/>
+                      <a:stretch>
+                        <a:fillRect/>
+                      </a:stretch>
+                    </p:blipFill>
+                    <p:spPr>
+                      <a:xfrm>
+                        <a:off x="8672195" y="5240020"/>
+                        <a:ext cx="2106295" cy="665480"/>
+                      </a:xfrm>
+                      <a:prstGeom prst="rect">
+                        <a:avLst/>
+                      </a:prstGeom>
+                    </p:spPr>
+                  </p:pic>
+                </p:oleObj>
+              </mc:Fallback>
+            </mc:AlternateContent>
+          </a:graphicData>
+        </a:graphic>
+      </p:graphicFrame>
+      <p:cxnSp>
+        <p:nvCxnSpPr>
+          <p:cNvPr id="57" name="直接箭头连接符 56"/>
+          <p:cNvCxnSpPr/>
+          <p:nvPr/>
+        </p:nvCxnSpPr>
+        <p:spPr>
+          <a:xfrm flipV="1">
+            <a:off x="2133600" y="2809240"/>
+            <a:ext cx="1864995" cy="29845"/>
+          </a:xfrm>
+          <a:prstGeom prst="straightConnector1">
+            <a:avLst/>
+          </a:prstGeom>
+          <a:ln>
+            <a:solidFill>
+              <a:srgbClr val="BF226A"/>
+            </a:solidFill>
+            <a:tailEnd type="arrow"/>
+          </a:ln>
+        </p:spPr>
+        <p:style>
+          <a:lnRef idx="2">
+            <a:schemeClr val="accent1"/>
+          </a:lnRef>
+          <a:fillRef idx="0">
+            <a:srgbClr val="FFFFFF"/>
+          </a:fillRef>
+          <a:effectRef idx="0">
+            <a:srgbClr val="FFFFFF"/>
+          </a:effectRef>
+          <a:fontRef idx="minor">
+            <a:schemeClr val="tx1"/>
+          </a:fontRef>
+        </p:style>
+      </p:cxnSp>
+      <p:cxnSp>
+        <p:nvCxnSpPr>
+          <p:cNvPr id="58" name="直接箭头连接符 57"/>
+          <p:cNvCxnSpPr/>
+          <p:nvPr/>
+        </p:nvCxnSpPr>
+        <p:spPr>
+          <a:xfrm flipH="1" flipV="1">
+            <a:off x="2021205" y="882650"/>
+            <a:ext cx="5080" cy="1809115"/>
+          </a:xfrm>
+          <a:prstGeom prst="straightConnector1">
+            <a:avLst/>
+          </a:prstGeom>
+          <a:ln>
+            <a:solidFill>
+              <a:srgbClr val="BF226A"/>
+            </a:solidFill>
+            <a:tailEnd type="arrow"/>
+          </a:ln>
+        </p:spPr>
+        <p:style>
+          <a:lnRef idx="2">
+            <a:schemeClr val="accent1"/>
+          </a:lnRef>
+          <a:fillRef idx="0">
+            <a:srgbClr val="FFFFFF"/>
+          </a:fillRef>
+          <a:effectRef idx="0">
+            <a:srgbClr val="FFFFFF"/>
+          </a:effectRef>
+          <a:fontRef idx="minor">
+            <a:schemeClr val="tx1"/>
+          </a:fontRef>
+        </p:style>
+      </p:cxnSp>
+      <p:sp>
+        <p:nvSpPr>
+          <p:cNvPr id="59" name="文本框 58"/>
+          <p:cNvSpPr txBox="1"/>
+          <p:nvPr/>
+        </p:nvSpPr>
+        <p:spPr>
+          <a:xfrm>
+            <a:off x="3044190" y="2828925"/>
+            <a:ext cx="469265" cy="368300"/>
+          </a:xfrm>
+          <a:prstGeom prst="rect">
+            <a:avLst/>
+          </a:prstGeom>
+          <a:noFill/>
+        </p:spPr>
+        <p:txBody>
+          <a:bodyPr wrap="square" rtlCol="0">
+            <a:spAutoFit/>
+          </a:bodyPr>
+          <a:p>
+            <a:r>
+              <a:rPr lang="en-US" altLang="zh-CN"/>
+              <a:t>x</a:t>
+            </a:r>
+            <a:endParaRPr lang="en-US" altLang="zh-CN"/>
+          </a:p>
+        </p:txBody>
+      </p:sp>
+      <p:sp>
+        <p:nvSpPr>
+          <p:cNvPr id="60" name="文本框 59"/>
+          <p:cNvSpPr txBox="1"/>
+          <p:nvPr/>
+        </p:nvSpPr>
+        <p:spPr>
+          <a:xfrm>
+            <a:off x="2133600" y="1021715"/>
+            <a:ext cx="469265" cy="368300"/>
+          </a:xfrm>
+          <a:prstGeom prst="rect">
+            <a:avLst/>
+          </a:prstGeom>
+          <a:noFill/>
+        </p:spPr>
+        <p:txBody>
+          <a:bodyPr wrap="square" rtlCol="0">
+            <a:spAutoFit/>
+          </a:bodyPr>
+          <a:p>
+            <a:r>
+              <a:rPr lang="en-US" altLang="zh-CN"/>
+              <a:t>y</a:t>
+            </a:r>
+            <a:endParaRPr lang="en-US" altLang="zh-CN"/>
+          </a:p>
+        </p:txBody>
+      </p:sp>
+      <p:sp>
+        <p:nvSpPr>
+          <p:cNvPr id="61" name="文本框 60"/>
+          <p:cNvSpPr txBox="1"/>
+          <p:nvPr/>
+        </p:nvSpPr>
+        <p:spPr>
+          <a:xfrm>
+            <a:off x="6389370" y="6099810"/>
+            <a:ext cx="1123315" cy="368300"/>
+          </a:xfrm>
+          <a:prstGeom prst="rect">
+            <a:avLst/>
+          </a:prstGeom>
+          <a:noFill/>
+        </p:spPr>
+        <p:txBody>
+          <a:bodyPr wrap="square" rtlCol="0">
+            <a:spAutoFit/>
+          </a:bodyPr>
+          <a:p>
+            <a:r>
+              <a:rPr lang="en-US" altLang="zh-CN"/>
+              <a:t>node_1</a:t>
+            </a:r>
+            <a:endParaRPr lang="en-US" altLang="zh-CN"/>
+          </a:p>
+        </p:txBody>
+      </p:sp>
+      <p:sp>
+        <p:nvSpPr>
+          <p:cNvPr id="62" name="文本框 61"/>
+          <p:cNvSpPr txBox="1"/>
+          <p:nvPr/>
+        </p:nvSpPr>
+        <p:spPr>
+          <a:xfrm>
+            <a:off x="7508240" y="4254500"/>
+            <a:ext cx="929005" cy="368300"/>
+          </a:xfrm>
+          <a:prstGeom prst="rect">
+            <a:avLst/>
+          </a:prstGeom>
+          <a:noFill/>
+        </p:spPr>
+        <p:txBody>
+          <a:bodyPr wrap="square" rtlCol="0">
+            <a:spAutoFit/>
+          </a:bodyPr>
+          <a:p>
+            <a:r>
+              <a:rPr lang="en-US" altLang="zh-CN"/>
+              <a:t>node_2</a:t>
+            </a:r>
+            <a:endParaRPr lang="en-US" altLang="zh-CN"/>
+          </a:p>
+        </p:txBody>
+      </p:sp>
     </p:spTree>
   </p:cSld>
   <p:clrMapOvr>
@@ -13749,6 +14565,635 @@
 </file>
 
 <file path=ppt/slides/slide6.xml><?xml version="1.0" encoding="utf-8"?>
+<p:sld xmlns:a="http://schemas.openxmlformats.org/drawingml/2006/main" xmlns:r="http://schemas.openxmlformats.org/officeDocument/2006/relationships" xmlns:p="http://schemas.openxmlformats.org/presentationml/2006/main">
+  <p:cSld>
+    <p:spTree>
+      <p:nvGrpSpPr>
+        <p:cNvPr id="1" name=""/>
+        <p:cNvGrpSpPr/>
+        <p:nvPr/>
+      </p:nvGrpSpPr>
+      <p:grpSpPr>
+        <a:xfrm>
+          <a:off x="0" y="0"/>
+          <a:ext cx="0" cy="0"/>
+          <a:chOff x="0" y="0"/>
+          <a:chExt cx="0" cy="0"/>
+        </a:xfrm>
+      </p:grpSpPr>
+      <p:sp>
+        <p:nvSpPr>
+          <p:cNvPr id="2" name="Rectangle 1"/>
+          <p:cNvSpPr/>
+          <p:nvPr/>
+        </p:nvSpPr>
+        <p:spPr>
+          <a:xfrm>
+            <a:off x="838200" y="1794649"/>
+            <a:ext cx="10766715" cy="583565"/>
+          </a:xfrm>
+          <a:prstGeom prst="rect">
+            <a:avLst/>
+          </a:prstGeom>
+        </p:spPr>
+        <p:txBody>
+          <a:bodyPr wrap="square">
+            <a:spAutoFit/>
+          </a:bodyPr>
+          <a:lstStyle/>
+          <a:p>
+            <a:pPr marL="457200" indent="-457200">
+              <a:buFont typeface="Arial" panose="020B0604020202020204" pitchFamily="34" charset="0"/>
+              <a:buChar char="•"/>
+              <a:defRPr/>
+            </a:pPr>
+            <a:endParaRPr lang="en-US" altLang="zh-CN" sz="3200" dirty="0">
+              <a:latin typeface="Kaiti TC" panose="02010600040101010101" pitchFamily="2" charset="-120"/>
+              <a:ea typeface="Kaiti TC" panose="02010600040101010101" pitchFamily="2" charset="-120"/>
+            </a:endParaRPr>
+          </a:p>
+        </p:txBody>
+      </p:sp>
+      <p:sp>
+        <p:nvSpPr>
+          <p:cNvPr id="7" name="Title 2"/>
+          <p:cNvSpPr txBox="1"/>
+          <p:nvPr/>
+        </p:nvSpPr>
+        <p:spPr>
+          <a:xfrm>
+            <a:off x="265430" y="459740"/>
+            <a:ext cx="10261600" cy="1082040"/>
+          </a:xfrm>
+          <a:prstGeom prst="rect">
+            <a:avLst/>
+          </a:prstGeom>
+        </p:spPr>
+        <p:txBody>
+          <a:bodyPr vert="horz" lIns="91440" tIns="45720" rIns="91440" bIns="45720" rtlCol="0" anchor="ctr">
+            <a:normAutofit/>
+          </a:bodyPr>
+          <a:lstStyle>
+            <a:lvl1pPr algn="l" defTabSz="914400" rtl="0" eaLnBrk="1" latinLnBrk="0" hangingPunct="1">
+              <a:lnSpc>
+                <a:spcPct val="90000"/>
+              </a:lnSpc>
+              <a:spcBef>
+                <a:spcPct val="0"/>
+              </a:spcBef>
+              <a:buNone/>
+              <a:defRPr sz="6000" kern="1200">
+                <a:solidFill>
+                  <a:srgbClr val="DD613B"/>
+                </a:solidFill>
+                <a:latin typeface="+mj-lt"/>
+                <a:ea typeface="+mj-ea"/>
+                <a:cs typeface="+mj-cs"/>
+              </a:defRPr>
+            </a:lvl1pPr>
+          </a:lstStyle>
+          <a:p>
+            <a:r>
+              <a:rPr lang="en-US" altLang="zh-CN" sz="4000" dirty="0" err="1">
+                <a:latin typeface="Times New Roman" panose="02020603050405020304" charset="0"/>
+                <a:ea typeface="微软雅黑" panose="020B0503020204020204" charset="-122"/>
+                <a:cs typeface="Times New Roman" panose="02020603050405020304" charset="0"/>
+                <a:sym typeface="+mn-ea"/>
+              </a:rPr>
+              <a:t>Optimization</a:t>
+            </a:r>
+            <a:endParaRPr lang="en-US" altLang="zh-CN" sz="4000" dirty="0" err="1">
+              <a:latin typeface="Times New Roman" panose="02020603050405020304" charset="0"/>
+              <a:ea typeface="微软雅黑" panose="020B0503020204020204" charset="-122"/>
+              <a:cs typeface="Times New Roman" panose="02020603050405020304" charset="0"/>
+              <a:sym typeface="+mn-ea"/>
+            </a:endParaRPr>
+          </a:p>
+        </p:txBody>
+      </p:sp>
+      <p:pic>
+        <p:nvPicPr>
+          <p:cNvPr id="14" name="图片 13" descr="路由器"/>
+          <p:cNvPicPr>
+            <a:picLocks noChangeAspect="1"/>
+          </p:cNvPicPr>
+          <p:nvPr>
+            <p:custDataLst>
+              <p:tags r:id="rId1"/>
+            </p:custDataLst>
+          </p:nvPr>
+        </p:nvPicPr>
+        <p:blipFill>
+          <a:blip/>
+          <a:stretch>
+            <a:fillRect/>
+          </a:stretch>
+        </p:blipFill>
+        <p:spPr>
+          <a:xfrm>
+            <a:off x="7359015" y="3982720"/>
+            <a:ext cx="153670" cy="153670"/>
+          </a:xfrm>
+          <a:prstGeom prst="rect">
+            <a:avLst/>
+          </a:prstGeom>
+        </p:spPr>
+      </p:pic>
+      <p:graphicFrame>
+        <p:nvGraphicFramePr>
+          <p:cNvPr id="56" name="对象 55">
+            <a:hlinkClick r:id="" action="ppaction://ole?verb="/>
+          </p:cNvPr>
+          <p:cNvGraphicFramePr>
+            <a:graphicFrameLocks noChangeAspect="1"/>
+          </p:cNvGraphicFramePr>
+          <p:nvPr/>
+        </p:nvGraphicFramePr>
+        <p:xfrm>
+          <a:off x="295910" y="2242820"/>
+          <a:ext cx="2978150" cy="830580"/>
+        </p:xfrm>
+        <a:graphic>
+          <a:graphicData uri="http://schemas.openxmlformats.org/presentationml/2006/ole">
+            <mc:AlternateContent xmlns:mc="http://schemas.openxmlformats.org/markup-compatibility/2006">
+              <mc:Choice xmlns:v="urn:schemas-microsoft-com:vml" Requires="v">
+                <p:oleObj spid="_x0000_s2049" name="" r:id="rId2" imgW="1548765" imgH="431800" progId="Equation.KSEE3">
+                  <p:embed/>
+                </p:oleObj>
+              </mc:Choice>
+              <mc:Fallback>
+                <p:oleObj name="" r:id="rId2" imgW="1548765" imgH="431800" progId="Equation.KSEE3">
+                  <p:embed/>
+                  <p:pic>
+                    <p:nvPicPr>
+                      <p:cNvPr id="0" name="图片 2048"/>
+                      <p:cNvPicPr/>
+                      <p:nvPr/>
+                    </p:nvPicPr>
+                    <p:blipFill>
+                      <a:blip r:embed="rId3"/>
+                      <a:stretch>
+                        <a:fillRect/>
+                      </a:stretch>
+                    </p:blipFill>
+                    <p:spPr>
+                      <a:xfrm>
+                        <a:off x="295910" y="2242820"/>
+                        <a:ext cx="2978150" cy="830580"/>
+                      </a:xfrm>
+                      <a:prstGeom prst="rect">
+                        <a:avLst/>
+                      </a:prstGeom>
+                    </p:spPr>
+                  </p:pic>
+                </p:oleObj>
+              </mc:Fallback>
+            </mc:AlternateContent>
+          </a:graphicData>
+        </a:graphic>
+      </p:graphicFrame>
+      <p:graphicFrame>
+        <p:nvGraphicFramePr>
+          <p:cNvPr id="57" name="对象 56">
+            <a:hlinkClick r:id="" action="ppaction://ole?verb="/>
+          </p:cNvPr>
+          <p:cNvGraphicFramePr>
+            <a:graphicFrameLocks noChangeAspect="1"/>
+          </p:cNvGraphicFramePr>
+          <p:nvPr/>
+        </p:nvGraphicFramePr>
+        <p:xfrm>
+          <a:off x="3738245" y="2242820"/>
+          <a:ext cx="355600" cy="662940"/>
+        </p:xfrm>
+        <a:graphic>
+          <a:graphicData uri="http://schemas.openxmlformats.org/presentationml/2006/ole">
+            <mc:AlternateContent xmlns:mc="http://schemas.openxmlformats.org/markup-compatibility/2006">
+              <mc:Choice xmlns:v="urn:schemas-microsoft-com:vml" Requires="v">
+                <p:oleObj spid="_x0000_s2050" name="" r:id="rId4" imgW="177165" imgH="330200" progId="Equation.KSEE3">
+                  <p:embed/>
+                </p:oleObj>
+              </mc:Choice>
+              <mc:Fallback>
+                <p:oleObj name="" r:id="rId4" imgW="177165" imgH="330200" progId="Equation.KSEE3">
+                  <p:embed/>
+                  <p:pic>
+                    <p:nvPicPr>
+                      <p:cNvPr id="0" name="图片 2049"/>
+                      <p:cNvPicPr/>
+                      <p:nvPr/>
+                    </p:nvPicPr>
+                    <p:blipFill>
+                      <a:blip r:embed="rId5"/>
+                      <a:stretch>
+                        <a:fillRect/>
+                      </a:stretch>
+                    </p:blipFill>
+                    <p:spPr>
+                      <a:xfrm>
+                        <a:off x="3738245" y="2242820"/>
+                        <a:ext cx="355600" cy="662940"/>
+                      </a:xfrm>
+                      <a:prstGeom prst="rect">
+                        <a:avLst/>
+                      </a:prstGeom>
+                    </p:spPr>
+                  </p:pic>
+                </p:oleObj>
+              </mc:Fallback>
+            </mc:AlternateContent>
+          </a:graphicData>
+        </a:graphic>
+      </p:graphicFrame>
+      <p:sp>
+        <p:nvSpPr>
+          <p:cNvPr id="58" name="文本框 57"/>
+          <p:cNvSpPr txBox="1"/>
+          <p:nvPr/>
+        </p:nvSpPr>
+        <p:spPr>
+          <a:xfrm>
+            <a:off x="4093845" y="2456180"/>
+            <a:ext cx="1626235" cy="449580"/>
+          </a:xfrm>
+          <a:prstGeom prst="rect">
+            <a:avLst/>
+          </a:prstGeom>
+          <a:noFill/>
+        </p:spPr>
+        <p:txBody>
+          <a:bodyPr wrap="square" rtlCol="0">
+            <a:noAutofit/>
+          </a:bodyPr>
+          <a:p>
+            <a:r>
+              <a:rPr lang="en-US" altLang="zh-CN" sz="2000">
+                <a:latin typeface="Times New Roman" panose="02020603050405020304" charset="0"/>
+                <a:cs typeface="Times New Roman" panose="02020603050405020304" charset="0"/>
+              </a:rPr>
+              <a:t>: Error Vector</a:t>
+            </a:r>
+            <a:endParaRPr lang="en-US" altLang="zh-CN" sz="2000">
+              <a:latin typeface="Times New Roman" panose="02020603050405020304" charset="0"/>
+              <a:cs typeface="Times New Roman" panose="02020603050405020304" charset="0"/>
+            </a:endParaRPr>
+          </a:p>
+        </p:txBody>
+      </p:sp>
+      <p:graphicFrame>
+        <p:nvGraphicFramePr>
+          <p:cNvPr id="59" name="对象 58">
+            <a:hlinkClick r:id="" action="ppaction://ole?verb="/>
+          </p:cNvPr>
+          <p:cNvGraphicFramePr>
+            <a:graphicFrameLocks noChangeAspect="1"/>
+          </p:cNvGraphicFramePr>
+          <p:nvPr/>
+        </p:nvGraphicFramePr>
+        <p:xfrm>
+          <a:off x="551815" y="3196590"/>
+          <a:ext cx="2353945" cy="621030"/>
+        </p:xfrm>
+        <a:graphic>
+          <a:graphicData uri="http://schemas.openxmlformats.org/presentationml/2006/ole">
+            <mc:AlternateContent xmlns:mc="http://schemas.openxmlformats.org/markup-compatibility/2006">
+              <mc:Choice xmlns:v="urn:schemas-microsoft-com:vml" Requires="v">
+                <p:oleObj spid="_x0000_s2051" name="" r:id="rId6" imgW="1155700" imgH="304800" progId="Equation.KSEE3">
+                  <p:embed/>
+                </p:oleObj>
+              </mc:Choice>
+              <mc:Fallback>
+                <p:oleObj name="" r:id="rId6" imgW="1155700" imgH="304800" progId="Equation.KSEE3">
+                  <p:embed/>
+                  <p:pic>
+                    <p:nvPicPr>
+                      <p:cNvPr id="0" name="图片 2050"/>
+                      <p:cNvPicPr/>
+                      <p:nvPr/>
+                    </p:nvPicPr>
+                    <p:blipFill>
+                      <a:blip r:embed="rId7"/>
+                      <a:stretch>
+                        <a:fillRect/>
+                      </a:stretch>
+                    </p:blipFill>
+                    <p:spPr>
+                      <a:xfrm>
+                        <a:off x="551815" y="3196590"/>
+                        <a:ext cx="2353945" cy="621030"/>
+                      </a:xfrm>
+                      <a:prstGeom prst="rect">
+                        <a:avLst/>
+                      </a:prstGeom>
+                    </p:spPr>
+                  </p:pic>
+                </p:oleObj>
+              </mc:Fallback>
+            </mc:AlternateContent>
+          </a:graphicData>
+        </a:graphic>
+      </p:graphicFrame>
+      <p:graphicFrame>
+        <p:nvGraphicFramePr>
+          <p:cNvPr id="60" name="对象 59">
+            <a:hlinkClick r:id="" action="ppaction://ole?verb="/>
+          </p:cNvPr>
+          <p:cNvGraphicFramePr>
+            <a:graphicFrameLocks noChangeAspect="1"/>
+          </p:cNvGraphicFramePr>
+          <p:nvPr/>
+        </p:nvGraphicFramePr>
+        <p:xfrm>
+          <a:off x="3516630" y="3187700"/>
+          <a:ext cx="708025" cy="566420"/>
+        </p:xfrm>
+        <a:graphic>
+          <a:graphicData uri="http://schemas.openxmlformats.org/presentationml/2006/ole">
+            <mc:AlternateContent xmlns:mc="http://schemas.openxmlformats.org/markup-compatibility/2006">
+              <mc:Choice xmlns:v="urn:schemas-microsoft-com:vml" Requires="v">
+                <p:oleObj spid="_x0000_s2052" name="" r:id="rId8" imgW="381000" imgH="304800" progId="Equation.KSEE3">
+                  <p:embed/>
+                </p:oleObj>
+              </mc:Choice>
+              <mc:Fallback>
+                <p:oleObj name="" r:id="rId8" imgW="381000" imgH="304800" progId="Equation.KSEE3">
+                  <p:embed/>
+                  <p:pic>
+                    <p:nvPicPr>
+                      <p:cNvPr id="0" name="图片 2051"/>
+                      <p:cNvPicPr/>
+                      <p:nvPr/>
+                    </p:nvPicPr>
+                    <p:blipFill>
+                      <a:blip r:embed="rId9"/>
+                      <a:stretch>
+                        <a:fillRect/>
+                      </a:stretch>
+                    </p:blipFill>
+                    <p:spPr>
+                      <a:xfrm>
+                        <a:off x="3516630" y="3187700"/>
+                        <a:ext cx="708025" cy="566420"/>
+                      </a:xfrm>
+                      <a:prstGeom prst="rect">
+                        <a:avLst/>
+                      </a:prstGeom>
+                    </p:spPr>
+                  </p:pic>
+                </p:oleObj>
+              </mc:Fallback>
+            </mc:AlternateContent>
+          </a:graphicData>
+        </a:graphic>
+      </p:graphicFrame>
+      <p:sp>
+        <p:nvSpPr>
+          <p:cNvPr id="61" name="文本框 60"/>
+          <p:cNvSpPr txBox="1"/>
+          <p:nvPr/>
+        </p:nvSpPr>
+        <p:spPr>
+          <a:xfrm>
+            <a:off x="4381500" y="3325495"/>
+            <a:ext cx="2537460" cy="398780"/>
+          </a:xfrm>
+          <a:prstGeom prst="rect">
+            <a:avLst/>
+          </a:prstGeom>
+          <a:noFill/>
+        </p:spPr>
+        <p:txBody>
+          <a:bodyPr wrap="square" rtlCol="0">
+            <a:spAutoFit/>
+          </a:bodyPr>
+          <a:p>
+            <a:r>
+              <a:rPr lang="en-US" altLang="zh-CN"/>
+              <a:t>:</a:t>
+            </a:r>
+            <a:r>
+              <a:rPr lang="en-US" altLang="zh-CN" sz="2000">
+                <a:latin typeface="Times New Roman" panose="02020603050405020304" charset="0"/>
+                <a:cs typeface="Times New Roman" panose="02020603050405020304" charset="0"/>
+              </a:rPr>
+              <a:t> Vector of node i and j</a:t>
+            </a:r>
+            <a:endParaRPr lang="en-US" altLang="zh-CN" sz="2000">
+              <a:latin typeface="Times New Roman" panose="02020603050405020304" charset="0"/>
+              <a:cs typeface="Times New Roman" panose="02020603050405020304" charset="0"/>
+            </a:endParaRPr>
+          </a:p>
+        </p:txBody>
+      </p:sp>
+      <p:graphicFrame>
+        <p:nvGraphicFramePr>
+          <p:cNvPr id="62" name="对象 61">
+            <a:hlinkClick r:id="" action="ppaction://ole?verb="/>
+          </p:cNvPr>
+          <p:cNvGraphicFramePr>
+            <a:graphicFrameLocks noChangeAspect="1"/>
+          </p:cNvGraphicFramePr>
+          <p:nvPr/>
+        </p:nvGraphicFramePr>
+        <p:xfrm>
+          <a:off x="7166610" y="3204845"/>
+          <a:ext cx="365125" cy="548640"/>
+        </p:xfrm>
+        <a:graphic>
+          <a:graphicData uri="http://schemas.openxmlformats.org/presentationml/2006/ole">
+            <mc:AlternateContent xmlns:mc="http://schemas.openxmlformats.org/markup-compatibility/2006">
+              <mc:Choice xmlns:v="urn:schemas-microsoft-com:vml" Requires="v">
+                <p:oleObj spid="_x0000_s2053" name="" r:id="rId10" imgW="203200" imgH="304800" progId="Equation.KSEE3">
+                  <p:embed/>
+                </p:oleObj>
+              </mc:Choice>
+              <mc:Fallback>
+                <p:oleObj name="" r:id="rId10" imgW="203200" imgH="304800" progId="Equation.KSEE3">
+                  <p:embed/>
+                  <p:pic>
+                    <p:nvPicPr>
+                      <p:cNvPr id="0" name="图片 2052"/>
+                      <p:cNvPicPr/>
+                      <p:nvPr/>
+                    </p:nvPicPr>
+                    <p:blipFill>
+                      <a:blip r:embed="rId11"/>
+                      <a:stretch>
+                        <a:fillRect/>
+                      </a:stretch>
+                    </p:blipFill>
+                    <p:spPr>
+                      <a:xfrm>
+                        <a:off x="7166610" y="3204845"/>
+                        <a:ext cx="365125" cy="548640"/>
+                      </a:xfrm>
+                      <a:prstGeom prst="rect">
+                        <a:avLst/>
+                      </a:prstGeom>
+                    </p:spPr>
+                  </p:pic>
+                </p:oleObj>
+              </mc:Fallback>
+            </mc:AlternateContent>
+          </a:graphicData>
+        </a:graphic>
+      </p:graphicFrame>
+      <p:sp>
+        <p:nvSpPr>
+          <p:cNvPr id="63" name="文本框 62"/>
+          <p:cNvSpPr txBox="1"/>
+          <p:nvPr/>
+        </p:nvSpPr>
+        <p:spPr>
+          <a:xfrm>
+            <a:off x="7779385" y="3204845"/>
+            <a:ext cx="2691130" cy="706755"/>
+          </a:xfrm>
+          <a:prstGeom prst="rect">
+            <a:avLst/>
+          </a:prstGeom>
+          <a:noFill/>
+        </p:spPr>
+        <p:txBody>
+          <a:bodyPr wrap="square" rtlCol="0">
+            <a:spAutoFit/>
+          </a:bodyPr>
+          <a:p>
+            <a:r>
+              <a:rPr lang="en-US" altLang="zh-CN" sz="2000">
+                <a:latin typeface="Times New Roman" panose="02020603050405020304" charset="0"/>
+                <a:cs typeface="Times New Roman" panose="02020603050405020304" charset="0"/>
+              </a:rPr>
+              <a:t>: Displacement Vector between node i and j</a:t>
+            </a:r>
+            <a:endParaRPr lang="en-US" altLang="zh-CN" sz="2000">
+              <a:latin typeface="Times New Roman" panose="02020603050405020304" charset="0"/>
+              <a:cs typeface="Times New Roman" panose="02020603050405020304" charset="0"/>
+            </a:endParaRPr>
+          </a:p>
+        </p:txBody>
+      </p:sp>
+      <p:sp>
+        <p:nvSpPr>
+          <p:cNvPr id="64" name="文本框 63"/>
+          <p:cNvSpPr txBox="1"/>
+          <p:nvPr/>
+        </p:nvSpPr>
+        <p:spPr>
+          <a:xfrm>
+            <a:off x="440690" y="4390390"/>
+            <a:ext cx="2907030" cy="1014730"/>
+          </a:xfrm>
+          <a:prstGeom prst="rect">
+            <a:avLst/>
+          </a:prstGeom>
+          <a:noFill/>
+        </p:spPr>
+        <p:txBody>
+          <a:bodyPr wrap="square" rtlCol="0">
+            <a:spAutoFit/>
+          </a:bodyPr>
+          <a:p>
+            <a:r>
+              <a:rPr lang="en-US" altLang="zh-CN" sz="2000">
+                <a:latin typeface="Times New Roman" panose="02020603050405020304" charset="0"/>
+                <a:cs typeface="Times New Roman" panose="02020603050405020304" charset="0"/>
+              </a:rPr>
+              <a:t>Methode: </a:t>
+            </a:r>
+            <a:endParaRPr lang="en-US" altLang="zh-CN" sz="2000">
+              <a:latin typeface="Times New Roman" panose="02020603050405020304" charset="0"/>
+              <a:cs typeface="Times New Roman" panose="02020603050405020304" charset="0"/>
+            </a:endParaRPr>
+          </a:p>
+          <a:p>
+            <a:pPr marL="285750" indent="-285750">
+              <a:buFont typeface="Wingdings" panose="05000000000000000000" charset="0"/>
+              <a:buChar char="Ø"/>
+            </a:pPr>
+            <a:r>
+              <a:rPr lang="en-US" altLang="zh-CN" sz="2000">
+                <a:latin typeface="Times New Roman" panose="02020603050405020304" charset="0"/>
+                <a:cs typeface="Times New Roman" panose="02020603050405020304" charset="0"/>
+              </a:rPr>
+              <a:t>Gauss-Newton</a:t>
+            </a:r>
+            <a:endParaRPr lang="en-US" altLang="zh-CN" sz="2000">
+              <a:latin typeface="Times New Roman" panose="02020603050405020304" charset="0"/>
+              <a:cs typeface="Times New Roman" panose="02020603050405020304" charset="0"/>
+            </a:endParaRPr>
+          </a:p>
+          <a:p>
+            <a:pPr marL="285750" indent="-285750">
+              <a:buFont typeface="Wingdings" panose="05000000000000000000" charset="0"/>
+              <a:buChar char="Ø"/>
+            </a:pPr>
+            <a:r>
+              <a:rPr lang="en-US" altLang="zh-CN" sz="2000">
+                <a:latin typeface="Times New Roman" panose="02020603050405020304" charset="0"/>
+                <a:cs typeface="Times New Roman" panose="02020603050405020304" charset="0"/>
+              </a:rPr>
+              <a:t>Levenberg-Marquardt</a:t>
+            </a:r>
+            <a:r>
+              <a:rPr lang="en-US" altLang="zh-CN"/>
+              <a:t> </a:t>
+            </a:r>
+            <a:endParaRPr lang="en-US" altLang="zh-CN"/>
+          </a:p>
+        </p:txBody>
+      </p:sp>
+      <p:sp>
+        <p:nvSpPr>
+          <p:cNvPr id="65" name="文本框 64"/>
+          <p:cNvSpPr txBox="1"/>
+          <p:nvPr/>
+        </p:nvSpPr>
+        <p:spPr>
+          <a:xfrm>
+            <a:off x="317500" y="1549400"/>
+            <a:ext cx="4064000" cy="398780"/>
+          </a:xfrm>
+          <a:prstGeom prst="rect">
+            <a:avLst/>
+          </a:prstGeom>
+        </p:spPr>
+        <p:txBody>
+          <a:bodyPr>
+            <a:spAutoFit/>
+            <a:extLst>
+              <a:ext uri="{4A0BC546-FE56-4ADE-93B0-CB8AF2F6F144}">
+                <wpsdc:textFrameExt xmlns:wpsdc="http://www.wps.cn/officeDocument/2022/drawingmlCustomData" type="text"/>
+              </a:ext>
+            </a:extLst>
+          </a:bodyPr>
+          <a:p>
+            <a:pPr algn="l"/>
+            <a:r>
+              <a:rPr lang="en-US" altLang="zh-CN" sz="2000">
+                <a:latin typeface="Times New Roman" panose="02020603050405020304" charset="0"/>
+                <a:ea typeface="微软雅黑" panose="020B0503020204020204" charset="-122"/>
+                <a:cs typeface="Times New Roman" panose="02020603050405020304" charset="0"/>
+              </a:rPr>
+              <a:t>Graph-based Optimization</a:t>
+            </a:r>
+            <a:endParaRPr lang="en-US" altLang="zh-CN" sz="2000">
+              <a:latin typeface="Times New Roman" panose="02020603050405020304" charset="0"/>
+              <a:ea typeface="微软雅黑" panose="020B0503020204020204" charset="-122"/>
+              <a:cs typeface="Times New Roman" panose="02020603050405020304" charset="0"/>
+            </a:endParaRPr>
+          </a:p>
+        </p:txBody>
+      </p:sp>
+    </p:spTree>
+  </p:cSld>
+  <p:clrMapOvr>
+    <a:masterClrMapping/>
+  </p:clrMapOvr>
+</p:sld>
+</file>
+
+<file path=ppt/slides/slide7.xml><?xml version="1.0" encoding="utf-8"?>
 <p:sld xmlns:a="http://schemas.openxmlformats.org/drawingml/2006/main" xmlns:r="http://schemas.openxmlformats.org/officeDocument/2006/relationships" xmlns:p="http://schemas.openxmlformats.org/presentationml/2006/main">
   <p:cSld>
     <p:spTree>
@@ -13977,7 +15422,20 @@
 </p:tagLst>
 </file>
 
-<file path=ppt/tags/tag33.xml><?xml version="1.0" encoding="utf-8"?>
+<file path=ppt/tags/tag30.xml><?xml version="1.0" encoding="utf-8"?>
+<p:tagLst xmlns:p="http://schemas.openxmlformats.org/presentationml/2006/main">
+  <p:tag name="KSO_DOCER_RESOURCE_TRACE_INFO" val="{&quot;id&quot;:&quot;3643177&quot;,&quot;origin&quot;:0,&quot;type&quot;:&quot;icons&quot;,&quot;user&quot;:&quot;310980984&quot;}"/>
+</p:tagLst>
+</file>
+
+<file path=ppt/tags/tag31.xml><?xml version="1.0" encoding="utf-8"?>
+<p:tagLst xmlns:p="http://schemas.openxmlformats.org/presentationml/2006/main">
+  <p:tag name="KSO_DOCER_RESOURCE_TRACE_INFO" val="{&quot;id&quot;:&quot;50039990&quot;,&quot;origin&quot;:0,&quot;type&quot;:&quot;icons&quot;,&quot;user&quot;:&quot;310980984&quot;}"/>
+  <p:tag name="KSO_WM_DIAGRAM_VIRTUALLY_FRAME" val="{&quot;height&quot;:157.9,&quot;left&quot;:548.5,&quot;top&quot;:116.8,&quot;width&quot;:371.75}"/>
+</p:tagLst>
+</file>
+
+<file path=ppt/tags/tag35.xml><?xml version="1.0" encoding="utf-8"?>
 <p:tagLst xmlns:p="http://schemas.openxmlformats.org/presentationml/2006/main">
   <p:tag name="resource_record_key" val="{&quot;10&quot;:[50039990,21557347,50013684,3643177]}"/>
 </p:tagLst>
@@ -15312,19 +16770,19 @@
 </FormTemplates>
 </file>
 
-<file path=customXml/itemProps30.xml><?xml version="1.0" encoding="utf-8"?>
+<file path=customXml/itemProps32.xml><?xml version="1.0" encoding="utf-8"?>
 <ds:datastoreItem xmlns:ds="http://schemas.openxmlformats.org/officeDocument/2006/customXml" ds:itemID="{FAF196E8-F5B0-48C6-818B-9DED3B3F4B9F}">
   <ds:schemaRefs/>
 </ds:datastoreItem>
 </file>
 
-<file path=customXml/itemProps31.xml><?xml version="1.0" encoding="utf-8"?>
+<file path=customXml/itemProps33.xml><?xml version="1.0" encoding="utf-8"?>
 <ds:datastoreItem xmlns:ds="http://schemas.openxmlformats.org/officeDocument/2006/customXml" ds:itemID="{5A95CB02-FDAC-45C3-9CB4-7E4403C86BD8}">
   <ds:schemaRefs/>
 </ds:datastoreItem>
 </file>
 
-<file path=customXml/itemProps32.xml><?xml version="1.0" encoding="utf-8"?>
+<file path=customXml/itemProps34.xml><?xml version="1.0" encoding="utf-8"?>
 <ds:datastoreItem xmlns:ds="http://schemas.openxmlformats.org/officeDocument/2006/customXml" ds:itemID="{8B561345-5481-4888-8BC1-875739BC27F9}">
   <ds:schemaRefs/>
 </ds:datastoreItem>
